--- a/public/fun/pack/pptx/birthday/돌잔치_29_감사인사중심_억새밭.pptx
+++ b/public/fun/pack/pptx/birthday/돌잔치_29_감사인사중심_억새밭.pptx
@@ -3286,6 +3286,14 @@
 <file path=ppt/slides/slide1.xml><?xml version="1.0" encoding="utf-8"?>
 <p:sld xmlns:a="http://schemas.openxmlformats.org/drawingml/2006/main" xmlns:p="http://schemas.openxmlformats.org/presentationml/2006/main" xmlns:r="http://schemas.openxmlformats.org/officeDocument/2006/relationships">
   <p:cSld>
+    <p:bg>
+      <p:bgPr>
+        <a:solidFill>
+          <a:srgbClr val="FBF5EC"/>
+        </a:solidFill>
+        <a:effectLst/>
+      </p:bgPr>
+    </p:bg>
     <p:spTree>
       <p:nvGrpSpPr>
         <p:cNvPr id="1" name=""/>
@@ -3293,30 +3301,119 @@
         <p:nvPr/>
       </p:nvGrpSpPr>
       <p:grpSpPr/>
-      <p:pic>
-        <p:nvPicPr>
-          <p:cNvPr id="3" name="표지 그림" descr="birthday-29.jpg"/>
-          <p:cNvPicPr>
-            <a:picLocks noChangeAspect="1"/>
-          </p:cNvPicPr>
+      <p:sp>
+        <p:nvSpPr>
+          <p:cNvPr id="3" name="사진 자리"/>
+          <p:cNvSpPr/>
           <p:nvPr/>
-        </p:nvPicPr>
-        <p:blipFill>
-          <a:blip r:embed="rId2"/>
-          <a:stretch>
-            <a:fillRect/>
-          </a:stretch>
-        </p:blipFill>
-        <p:spPr>
-          <a:xfrm>
-            <a:off x="0" y="0"/>
-            <a:ext cx="12191695" cy="6858000"/>
+        </p:nvSpPr>
+        <p:spPr>
+          <a:xfrm>
+            <a:off x="1463003" y="685800"/>
+            <a:ext cx="3169840" cy="5486400"/>
+          </a:xfrm>
+          <a:prstGeom prst="round2SameRect">
+            <a:avLst>
+              <a:gd name="adj1" fmla="val 50000"/>
+              <a:gd name="adj2" fmla="val 0"/>
+            </a:avLst>
+          </a:prstGeom>
+          <a:solidFill>
+            <a:srgbClr val="EBD2AD"/>
+          </a:solidFill>
+          <a:ln>
+            <a:noFill/>
+          </a:ln>
+        </p:spPr>
+        <p:txBody>
+          <a:bodyPr rtlCol="0" anchor="ctr" wrap="square" lIns="54864" rIns="54864" tIns="27432" bIns="27432">
+            <a:noAutofit/>
+          </a:bodyPr>
+          <a:lstStyle/>
+          <a:p>
+            <a:pPr algn="ctr">
+              <a:lnSpc>
+                <a:spcPct val="100000"/>
+              </a:lnSpc>
+            </a:pPr>
+            <a:r>
+              <a:rPr sz="1400" b="0" i="0">
+                <a:solidFill>
+                  <a:srgbClr val="493B27"/>
+                </a:solidFill>
+              </a:rPr>
+              <a:t>사진을 넣어 주세요</a:t>
+            </a:r>
+          </a:p>
+        </p:txBody>
+      </p:sp>
+      <p:sp>
+        <p:nvSpPr>
+          <p:cNvPr id="4" name="장식"/>
+          <p:cNvSpPr/>
+          <p:nvPr/>
+        </p:nvSpPr>
+        <p:spPr>
+          <a:xfrm>
+            <a:off x="4358505" y="4251960"/>
+            <a:ext cx="1005840" cy="1005840"/>
+          </a:xfrm>
+          <a:prstGeom prst="ellipse">
+            <a:avLst/>
+          </a:prstGeom>
+          <a:solidFill>
+            <a:srgbClr val="EBD2AD"/>
+          </a:solidFill>
+          <a:ln>
+            <a:noFill/>
+          </a:ln>
+        </p:spPr>
+        <p:txBody>
+          <a:bodyPr rtlCol="0" anchor="ctr"/>
+          <a:lstStyle/>
+          <a:p>
+            <a:pPr algn="ctr"/>
+          </a:p>
+        </p:txBody>
+      </p:sp>
+      <p:sp>
+        <p:nvSpPr>
+          <p:cNvPr id="5" name="라벨"/>
+          <p:cNvSpPr txBox="1"/>
+          <p:nvPr/>
+        </p:nvSpPr>
+        <p:spPr>
+          <a:xfrm>
+            <a:off x="6827349" y="2148840"/>
+            <a:ext cx="4632844" cy="274320"/>
           </a:xfrm>
           <a:prstGeom prst="rect">
             <a:avLst/>
           </a:prstGeom>
-        </p:spPr>
-      </p:pic>
+          <a:noFill/>
+        </p:spPr>
+        <p:txBody>
+          <a:bodyPr wrap="square" lIns="54864" rIns="54864" tIns="27432" bIns="27432" anchor="t">
+            <a:noAutofit/>
+          </a:bodyPr>
+          <a:lstStyle/>
+          <a:p>
+            <a:pPr algn="l">
+              <a:lnSpc>
+                <a:spcPct val="115000"/>
+              </a:lnSpc>
+            </a:pPr>
+            <a:r>
+              <a:rPr sz="1000" b="1" i="0" spc="250">
+                <a:solidFill>
+                  <a:srgbClr val="26231F"/>
+                </a:solidFill>
+              </a:rPr>
+              <a:t>FIRST BIRTHDAY</a:t>
+            </a:r>
+          </a:p>
+        </p:txBody>
+      </p:sp>
       <p:sp>
         <p:nvSpPr>
           <p:cNvPr id="2" name="Title 1"/>
@@ -3329,8 +3426,8 @@
         </p:nvSpPr>
         <p:spPr>
           <a:xfrm>
-            <a:off x="853418" y="2057400"/>
-            <a:ext cx="6095847" cy="1554480"/>
+            <a:off x="6827349" y="2606040"/>
+            <a:ext cx="4632844" cy="1188720"/>
           </a:xfrm>
         </p:spPr>
         <p:txBody>
@@ -3347,7 +3444,7 @@
             <a:r>
               <a:rPr sz="4000" b="1" i="0">
                 <a:solidFill>
-                  <a:srgbClr val="59472C"/>
+                  <a:srgbClr val="26231F"/>
                 </a:solidFill>
               </a:rPr>
               <a:t>첫 번째 생일</a:t>
@@ -3357,14 +3454,14 @@
       </p:sp>
       <p:sp>
         <p:nvSpPr>
-          <p:cNvPr id="4" name="한 줄 문구"/>
+          <p:cNvPr id="6" name="한 줄 문구"/>
           <p:cNvSpPr txBox="1"/>
           <p:nvPr/>
         </p:nvSpPr>
         <p:spPr>
           <a:xfrm>
-            <a:off x="853418" y="3749039"/>
-            <a:ext cx="6095847" cy="822960"/>
+            <a:off x="6827349" y="3886200"/>
+            <a:ext cx="4632844" cy="822960"/>
           </a:xfrm>
           <a:prstGeom prst="rect">
             <a:avLst/>
@@ -3383,9 +3480,9 @@
               </a:lnSpc>
             </a:pPr>
             <a:r>
-              <a:rPr sz="1700" b="0" i="1">
+              <a:rPr sz="1700" b="0" i="0">
                 <a:solidFill>
-                  <a:srgbClr val="59472C"/>
+                  <a:srgbClr val="26231F"/>
                 </a:solidFill>
               </a:rPr>
               <a:t>멀리서 오신 분들께 먼저 인사드립니다</a:t>
@@ -3395,14 +3492,14 @@
       </p:sp>
       <p:sp>
         <p:nvSpPr>
-          <p:cNvPr id="5" name="안내 문구"/>
+          <p:cNvPr id="7" name="안내 문구"/>
           <p:cNvSpPr txBox="1"/>
           <p:nvPr/>
         </p:nvSpPr>
         <p:spPr>
           <a:xfrm>
-            <a:off x="853418" y="4617720"/>
-            <a:ext cx="6095847" cy="914400"/>
+            <a:off x="6827349" y="4754880"/>
+            <a:ext cx="4632844" cy="914400"/>
           </a:xfrm>
           <a:prstGeom prst="rect">
             <a:avLst/>
@@ -3423,10 +3520,10 @@
             <a:r>
               <a:rPr sz="1400" b="0" i="0">
                 <a:solidFill>
-                  <a:srgbClr val="666666"/>
+                  <a:srgbClr val="26231F"/>
                 </a:solidFill>
               </a:rPr>
-              <a:t>아기 이름 · 2027. 00. 00</a:t>
+              <a:t>아기 이름 · 날짜 입력</a:t>
             </a:r>
           </a:p>
           <a:p>
@@ -3438,7 +3535,7 @@
             <a:r>
               <a:rPr sz="1400" b="0" i="0">
                 <a:solidFill>
-                  <a:srgbClr val="666666"/>
+                  <a:srgbClr val="26231F"/>
                 </a:solidFill>
               </a:rPr>
               <a:t>장소를 입력하세요</a:t>
@@ -3460,7 +3557,7 @@
     <p:bg>
       <p:bgPr>
         <a:solidFill>
-          <a:srgbClr val="FFFFFF"/>
+          <a:srgbClr val="F6E9D5"/>
         </a:solidFill>
         <a:effectLst/>
       </p:bgPr>
@@ -3480,14 +3577,14 @@
         </p:nvSpPr>
         <p:spPr>
           <a:xfrm>
-            <a:off x="-182880" y="6144768"/>
-            <a:ext cx="12557455" cy="731520"/>
-          </a:xfrm>
-          <a:prstGeom prst="wave">
+            <a:off x="640080" y="566928"/>
+            <a:ext cx="10911535" cy="10972"/>
+          </a:xfrm>
+          <a:prstGeom prst="rect">
             <a:avLst/>
           </a:prstGeom>
           <a:solidFill>
-            <a:srgbClr val="ECE3D4"/>
+            <a:srgbClr val="26231F"/>
           </a:solidFill>
           <a:ln>
             <a:noFill/>
@@ -3503,20 +3600,58 @@
       </p:sp>
       <p:sp>
         <p:nvSpPr>
-          <p:cNvPr id="4" name="장식"/>
+          <p:cNvPr id="4" name="상단 라벨"/>
+          <p:cNvSpPr txBox="1"/>
+          <p:nvPr/>
+        </p:nvSpPr>
+        <p:spPr>
+          <a:xfrm>
+            <a:off x="640080" y="237744"/>
+            <a:ext cx="5486400" cy="274320"/>
+          </a:xfrm>
+          <a:prstGeom prst="rect">
+            <a:avLst/>
+          </a:prstGeom>
+          <a:noFill/>
+        </p:spPr>
+        <p:txBody>
+          <a:bodyPr wrap="square" lIns="54864" rIns="54864" tIns="27432" bIns="27432" anchor="ctr">
+            <a:noAutofit/>
+          </a:bodyPr>
+          <a:lstStyle/>
+          <a:p>
+            <a:pPr algn="l">
+              <a:lnSpc>
+                <a:spcPct val="115000"/>
+              </a:lnSpc>
+            </a:pPr>
+            <a:r>
+              <a:rPr sz="900" b="1" i="0" spc="250">
+                <a:solidFill>
+                  <a:srgbClr val="26231F"/>
+                </a:solidFill>
+              </a:rPr>
+              <a:t>FIRST BIRTHDAY</a:t>
+            </a:r>
+          </a:p>
+        </p:txBody>
+      </p:sp>
+      <p:sp>
+        <p:nvSpPr>
+          <p:cNvPr id="5" name="포인트"/>
           <p:cNvSpPr/>
           <p:nvPr/>
         </p:nvSpPr>
         <p:spPr>
           <a:xfrm>
-            <a:off x="-182880" y="6400800"/>
-            <a:ext cx="12557455" cy="502920"/>
-          </a:xfrm>
-          <a:prstGeom prst="wave">
+            <a:off x="11204143" y="246888"/>
+            <a:ext cx="237744" cy="237744"/>
+          </a:xfrm>
+          <a:prstGeom prst="round2SameRect">
             <a:avLst/>
           </a:prstGeom>
           <a:solidFill>
-            <a:srgbClr val="9D7D4D"/>
+            <a:srgbClr val="D8B279"/>
           </a:solidFill>
           <a:ln>
             <a:noFill/>
@@ -3542,8 +3677,8 @@
         </p:nvSpPr>
         <p:spPr>
           <a:xfrm>
-            <a:off x="640080" y="457200"/>
-            <a:ext cx="9722815" cy="868680"/>
+            <a:off x="640080" y="731520"/>
+            <a:ext cx="10911535" cy="822960"/>
           </a:xfrm>
         </p:spPr>
         <p:txBody>
@@ -3560,7 +3695,7 @@
             <a:r>
               <a:rPr sz="3000" b="1" i="0">
                 <a:solidFill>
-                  <a:srgbClr val="59472C"/>
+                  <a:srgbClr val="26231F"/>
                 </a:solidFill>
               </a:rPr>
               <a:t>우리 아기를 소개합니다</a:t>
@@ -3570,14 +3705,14 @@
       </p:sp>
       <p:sp>
         <p:nvSpPr>
-          <p:cNvPr id="5" name="사진 자리"/>
+          <p:cNvPr id="6" name="사진 자리"/>
           <p:cNvSpPr/>
           <p:nvPr/>
         </p:nvSpPr>
         <p:spPr>
           <a:xfrm>
-            <a:off x="640080" y="1554480"/>
-            <a:ext cx="3840480" cy="4206240"/>
+            <a:off x="640080" y="1783080"/>
+            <a:ext cx="3840480" cy="4389120"/>
           </a:xfrm>
           <a:prstGeom prst="roundRect">
             <a:avLst>
@@ -3585,12 +3720,10 @@
             </a:avLst>
           </a:prstGeom>
           <a:solidFill>
-            <a:srgbClr val="ECE3D4"/>
+            <a:srgbClr val="F6E9D5"/>
           </a:solidFill>
           <a:ln w="19050">
-            <a:solidFill>
-              <a:srgbClr val="9D7D4D"/>
-            </a:solidFill>
+            <a:noFill/>
             <a:prstDash val="dash"/>
           </a:ln>
         </p:spPr>
@@ -3608,7 +3741,7 @@
             <a:r>
               <a:rPr sz="1400" b="0" i="0">
                 <a:solidFill>
-                  <a:srgbClr val="59472C"/>
+                  <a:srgbClr val="8E8780"/>
                 </a:solidFill>
               </a:rPr>
               <a:t>아기 사진을 넣어 주세요</a:t>
@@ -3618,14 +3751,14 @@
       </p:sp>
       <p:graphicFrame>
         <p:nvGraphicFramePr>
-          <p:cNvPr id="6" name="표"/>
+          <p:cNvPr id="7" name="표"/>
           <p:cNvGraphicFramePr>
             <a:graphicFrameLocks noGrp="1"/>
           </p:cNvGraphicFramePr>
           <p:nvPr/>
         </p:nvGraphicFramePr>
         <p:xfrm>
-          <a:off x="4846320" y="1554480"/>
+          <a:off x="4846320" y="1783080"/>
           <a:ext cx="6705295" cy="3950208"/>
         </p:xfrm>
         <a:graphic>
@@ -3648,7 +3781,7 @@
                       <a:r>
                         <a:rPr sz="1500" b="1">
                           <a:solidFill>
-                            <a:srgbClr val="59472C"/>
+                            <a:srgbClr val="493B27"/>
                           </a:solidFill>
                         </a:rPr>
                         <a:t>이름</a:t>
@@ -3658,30 +3791,30 @@
                   <a:tcPr anchor="ctr" marL="73152" marR="73152">
                     <a:lnL w="9525" cap="flat" cmpd="sng" algn="ctr">
                       <a:solidFill>
-                        <a:srgbClr val="ECE3D4"/>
+                        <a:srgbClr val="F6E9D5"/>
                       </a:solidFill>
                       <a:prstDash val="solid"/>
                     </a:lnL>
                     <a:lnR w="9525" cap="flat" cmpd="sng" algn="ctr">
                       <a:solidFill>
-                        <a:srgbClr val="ECE3D4"/>
+                        <a:srgbClr val="F6E9D5"/>
                       </a:solidFill>
                       <a:prstDash val="solid"/>
                     </a:lnR>
                     <a:lnT w="9525" cap="flat" cmpd="sng" algn="ctr">
                       <a:solidFill>
-                        <a:srgbClr val="ECE3D4"/>
+                        <a:srgbClr val="F6E9D5"/>
                       </a:solidFill>
                       <a:prstDash val="solid"/>
                     </a:lnT>
                     <a:lnB w="9525" cap="flat" cmpd="sng" algn="ctr">
                       <a:solidFill>
-                        <a:srgbClr val="ECE3D4"/>
+                        <a:srgbClr val="F6E9D5"/>
                       </a:solidFill>
                       <a:prstDash val="solid"/>
                     </a:lnB>
                     <a:solidFill>
-                      <a:srgbClr val="ECE3D4"/>
+                      <a:srgbClr val="F6E9D5"/>
                     </a:solidFill>
                   </a:tcPr>
                 </a:tc>
@@ -3694,7 +3827,7 @@
                       <a:r>
                         <a:rPr sz="1500" b="0">
                           <a:solidFill>
-                            <a:srgbClr val="2B2B2B"/>
+                            <a:srgbClr val="26231F"/>
                           </a:solidFill>
                         </a:rPr>
                         <a:t>입력하세요</a:t>
@@ -3704,30 +3837,30 @@
                   <a:tcPr anchor="ctr" marL="73152" marR="73152">
                     <a:lnL w="9525" cap="flat" cmpd="sng" algn="ctr">
                       <a:solidFill>
-                        <a:srgbClr val="ECE3D4"/>
+                        <a:srgbClr val="F6E9D5"/>
                       </a:solidFill>
                       <a:prstDash val="solid"/>
                     </a:lnL>
                     <a:lnR w="9525" cap="flat" cmpd="sng" algn="ctr">
                       <a:solidFill>
-                        <a:srgbClr val="ECE3D4"/>
+                        <a:srgbClr val="F6E9D5"/>
                       </a:solidFill>
                       <a:prstDash val="solid"/>
                     </a:lnR>
                     <a:lnT w="9525" cap="flat" cmpd="sng" algn="ctr">
                       <a:solidFill>
-                        <a:srgbClr val="ECE3D4"/>
+                        <a:srgbClr val="F6E9D5"/>
                       </a:solidFill>
                       <a:prstDash val="solid"/>
                     </a:lnT>
                     <a:lnB w="9525" cap="flat" cmpd="sng" algn="ctr">
                       <a:solidFill>
-                        <a:srgbClr val="ECE3D4"/>
+                        <a:srgbClr val="F6E9D5"/>
                       </a:solidFill>
                       <a:prstDash val="solid"/>
                     </a:lnB>
                     <a:solidFill>
-                      <a:srgbClr val="F8F5F1"/>
+                      <a:srgbClr val="FBF5EC"/>
                     </a:solidFill>
                   </a:tcPr>
                 </a:tc>
@@ -3742,7 +3875,7 @@
                       <a:r>
                         <a:rPr sz="1500" b="1">
                           <a:solidFill>
-                            <a:srgbClr val="59472C"/>
+                            <a:srgbClr val="493B27"/>
                           </a:solidFill>
                         </a:rPr>
                         <a:t>생일</a:t>
@@ -3752,30 +3885,30 @@
                   <a:tcPr anchor="ctr" marL="73152" marR="73152">
                     <a:lnL w="9525" cap="flat" cmpd="sng" algn="ctr">
                       <a:solidFill>
-                        <a:srgbClr val="ECE3D4"/>
+                        <a:srgbClr val="F6E9D5"/>
                       </a:solidFill>
                       <a:prstDash val="solid"/>
                     </a:lnL>
                     <a:lnR w="9525" cap="flat" cmpd="sng" algn="ctr">
                       <a:solidFill>
-                        <a:srgbClr val="ECE3D4"/>
+                        <a:srgbClr val="F6E9D5"/>
                       </a:solidFill>
                       <a:prstDash val="solid"/>
                     </a:lnR>
                     <a:lnT w="9525" cap="flat" cmpd="sng" algn="ctr">
                       <a:solidFill>
-                        <a:srgbClr val="ECE3D4"/>
+                        <a:srgbClr val="F6E9D5"/>
                       </a:solidFill>
                       <a:prstDash val="solid"/>
                     </a:lnT>
                     <a:lnB w="9525" cap="flat" cmpd="sng" algn="ctr">
                       <a:solidFill>
-                        <a:srgbClr val="ECE3D4"/>
+                        <a:srgbClr val="F6E9D5"/>
                       </a:solidFill>
                       <a:prstDash val="solid"/>
                     </a:lnB>
                     <a:solidFill>
-                      <a:srgbClr val="ECE3D4"/>
+                      <a:srgbClr val="F6E9D5"/>
                     </a:solidFill>
                   </a:tcPr>
                 </a:tc>
@@ -3788,7 +3921,7 @@
                       <a:r>
                         <a:rPr sz="1500" b="0">
                           <a:solidFill>
-                            <a:srgbClr val="2B2B2B"/>
+                            <a:srgbClr val="26231F"/>
                           </a:solidFill>
                         </a:rPr>
                         <a:t>입력하세요</a:t>
@@ -3798,25 +3931,25 @@
                   <a:tcPr anchor="ctr" marL="73152" marR="73152">
                     <a:lnL w="9525" cap="flat" cmpd="sng" algn="ctr">
                       <a:solidFill>
-                        <a:srgbClr val="ECE3D4"/>
+                        <a:srgbClr val="F6E9D5"/>
                       </a:solidFill>
                       <a:prstDash val="solid"/>
                     </a:lnL>
                     <a:lnR w="9525" cap="flat" cmpd="sng" algn="ctr">
                       <a:solidFill>
-                        <a:srgbClr val="ECE3D4"/>
+                        <a:srgbClr val="F6E9D5"/>
                       </a:solidFill>
                       <a:prstDash val="solid"/>
                     </a:lnR>
                     <a:lnT w="9525" cap="flat" cmpd="sng" algn="ctr">
                       <a:solidFill>
-                        <a:srgbClr val="ECE3D4"/>
+                        <a:srgbClr val="F6E9D5"/>
                       </a:solidFill>
                       <a:prstDash val="solid"/>
                     </a:lnT>
                     <a:lnB w="9525" cap="flat" cmpd="sng" algn="ctr">
                       <a:solidFill>
-                        <a:srgbClr val="ECE3D4"/>
+                        <a:srgbClr val="F6E9D5"/>
                       </a:solidFill>
                       <a:prstDash val="solid"/>
                     </a:lnB>
@@ -3836,7 +3969,7 @@
                       <a:r>
                         <a:rPr sz="1500" b="1">
                           <a:solidFill>
-                            <a:srgbClr val="59472C"/>
+                            <a:srgbClr val="493B27"/>
                           </a:solidFill>
                         </a:rPr>
                         <a:t>키 · 몸무게</a:t>
@@ -3846,30 +3979,30 @@
                   <a:tcPr anchor="ctr" marL="73152" marR="73152">
                     <a:lnL w="9525" cap="flat" cmpd="sng" algn="ctr">
                       <a:solidFill>
-                        <a:srgbClr val="ECE3D4"/>
+                        <a:srgbClr val="F6E9D5"/>
                       </a:solidFill>
                       <a:prstDash val="solid"/>
                     </a:lnL>
                     <a:lnR w="9525" cap="flat" cmpd="sng" algn="ctr">
                       <a:solidFill>
-                        <a:srgbClr val="ECE3D4"/>
+                        <a:srgbClr val="F6E9D5"/>
                       </a:solidFill>
                       <a:prstDash val="solid"/>
                     </a:lnR>
                     <a:lnT w="9525" cap="flat" cmpd="sng" algn="ctr">
                       <a:solidFill>
-                        <a:srgbClr val="ECE3D4"/>
+                        <a:srgbClr val="F6E9D5"/>
                       </a:solidFill>
                       <a:prstDash val="solid"/>
                     </a:lnT>
                     <a:lnB w="9525" cap="flat" cmpd="sng" algn="ctr">
                       <a:solidFill>
-                        <a:srgbClr val="ECE3D4"/>
+                        <a:srgbClr val="F6E9D5"/>
                       </a:solidFill>
                       <a:prstDash val="solid"/>
                     </a:lnB>
                     <a:solidFill>
-                      <a:srgbClr val="ECE3D4"/>
+                      <a:srgbClr val="F6E9D5"/>
                     </a:solidFill>
                   </a:tcPr>
                 </a:tc>
@@ -3882,7 +4015,7 @@
                       <a:r>
                         <a:rPr sz="1500" b="0">
                           <a:solidFill>
-                            <a:srgbClr val="2B2B2B"/>
+                            <a:srgbClr val="26231F"/>
                           </a:solidFill>
                         </a:rPr>
                         <a:t>입력하세요</a:t>
@@ -3892,30 +4025,30 @@
                   <a:tcPr anchor="ctr" marL="73152" marR="73152">
                     <a:lnL w="9525" cap="flat" cmpd="sng" algn="ctr">
                       <a:solidFill>
-                        <a:srgbClr val="ECE3D4"/>
+                        <a:srgbClr val="F6E9D5"/>
                       </a:solidFill>
                       <a:prstDash val="solid"/>
                     </a:lnL>
                     <a:lnR w="9525" cap="flat" cmpd="sng" algn="ctr">
                       <a:solidFill>
-                        <a:srgbClr val="ECE3D4"/>
+                        <a:srgbClr val="F6E9D5"/>
                       </a:solidFill>
                       <a:prstDash val="solid"/>
                     </a:lnR>
                     <a:lnT w="9525" cap="flat" cmpd="sng" algn="ctr">
                       <a:solidFill>
-                        <a:srgbClr val="ECE3D4"/>
+                        <a:srgbClr val="F6E9D5"/>
                       </a:solidFill>
                       <a:prstDash val="solid"/>
                     </a:lnT>
                     <a:lnB w="9525" cap="flat" cmpd="sng" algn="ctr">
                       <a:solidFill>
-                        <a:srgbClr val="ECE3D4"/>
+                        <a:srgbClr val="F6E9D5"/>
                       </a:solidFill>
                       <a:prstDash val="solid"/>
                     </a:lnB>
                     <a:solidFill>
-                      <a:srgbClr val="F8F5F1"/>
+                      <a:srgbClr val="FBF5EC"/>
                     </a:solidFill>
                   </a:tcPr>
                 </a:tc>
@@ -3930,7 +4063,7 @@
                       <a:r>
                         <a:rPr sz="1500" b="1">
                           <a:solidFill>
-                            <a:srgbClr val="59472C"/>
+                            <a:srgbClr val="493B27"/>
                           </a:solidFill>
                         </a:rPr>
                         <a:t>좋아하는 것</a:t>
@@ -3940,30 +4073,30 @@
                   <a:tcPr anchor="ctr" marL="73152" marR="73152">
                     <a:lnL w="9525" cap="flat" cmpd="sng" algn="ctr">
                       <a:solidFill>
-                        <a:srgbClr val="ECE3D4"/>
+                        <a:srgbClr val="F6E9D5"/>
                       </a:solidFill>
                       <a:prstDash val="solid"/>
                     </a:lnL>
                     <a:lnR w="9525" cap="flat" cmpd="sng" algn="ctr">
                       <a:solidFill>
-                        <a:srgbClr val="ECE3D4"/>
+                        <a:srgbClr val="F6E9D5"/>
                       </a:solidFill>
                       <a:prstDash val="solid"/>
                     </a:lnR>
                     <a:lnT w="9525" cap="flat" cmpd="sng" algn="ctr">
                       <a:solidFill>
-                        <a:srgbClr val="ECE3D4"/>
+                        <a:srgbClr val="F6E9D5"/>
                       </a:solidFill>
                       <a:prstDash val="solid"/>
                     </a:lnT>
                     <a:lnB w="9525" cap="flat" cmpd="sng" algn="ctr">
                       <a:solidFill>
-                        <a:srgbClr val="ECE3D4"/>
+                        <a:srgbClr val="F6E9D5"/>
                       </a:solidFill>
                       <a:prstDash val="solid"/>
                     </a:lnB>
                     <a:solidFill>
-                      <a:srgbClr val="ECE3D4"/>
+                      <a:srgbClr val="F6E9D5"/>
                     </a:solidFill>
                   </a:tcPr>
                 </a:tc>
@@ -3976,7 +4109,7 @@
                       <a:r>
                         <a:rPr sz="1500" b="0">
                           <a:solidFill>
-                            <a:srgbClr val="2B2B2B"/>
+                            <a:srgbClr val="26231F"/>
                           </a:solidFill>
                         </a:rPr>
                         <a:t>입력하세요</a:t>
@@ -3986,25 +4119,25 @@
                   <a:tcPr anchor="ctr" marL="73152" marR="73152">
                     <a:lnL w="9525" cap="flat" cmpd="sng" algn="ctr">
                       <a:solidFill>
-                        <a:srgbClr val="ECE3D4"/>
+                        <a:srgbClr val="F6E9D5"/>
                       </a:solidFill>
                       <a:prstDash val="solid"/>
                     </a:lnL>
                     <a:lnR w="9525" cap="flat" cmpd="sng" algn="ctr">
                       <a:solidFill>
-                        <a:srgbClr val="ECE3D4"/>
+                        <a:srgbClr val="F6E9D5"/>
                       </a:solidFill>
                       <a:prstDash val="solid"/>
                     </a:lnR>
                     <a:lnT w="9525" cap="flat" cmpd="sng" algn="ctr">
                       <a:solidFill>
-                        <a:srgbClr val="ECE3D4"/>
+                        <a:srgbClr val="F6E9D5"/>
                       </a:solidFill>
                       <a:prstDash val="solid"/>
                     </a:lnT>
                     <a:lnB w="9525" cap="flat" cmpd="sng" algn="ctr">
                       <a:solidFill>
-                        <a:srgbClr val="ECE3D4"/>
+                        <a:srgbClr val="F6E9D5"/>
                       </a:solidFill>
                       <a:prstDash val="solid"/>
                     </a:lnB>
@@ -4024,7 +4157,7 @@
                       <a:r>
                         <a:rPr sz="1500" b="1">
                           <a:solidFill>
-                            <a:srgbClr val="59472C"/>
+                            <a:srgbClr val="493B27"/>
                           </a:solidFill>
                         </a:rPr>
                         <a:t>별명</a:t>
@@ -4034,30 +4167,30 @@
                   <a:tcPr anchor="ctr" marL="73152" marR="73152">
                     <a:lnL w="9525" cap="flat" cmpd="sng" algn="ctr">
                       <a:solidFill>
-                        <a:srgbClr val="ECE3D4"/>
+                        <a:srgbClr val="F6E9D5"/>
                       </a:solidFill>
                       <a:prstDash val="solid"/>
                     </a:lnL>
                     <a:lnR w="9525" cap="flat" cmpd="sng" algn="ctr">
                       <a:solidFill>
-                        <a:srgbClr val="ECE3D4"/>
+                        <a:srgbClr val="F6E9D5"/>
                       </a:solidFill>
                       <a:prstDash val="solid"/>
                     </a:lnR>
                     <a:lnT w="9525" cap="flat" cmpd="sng" algn="ctr">
                       <a:solidFill>
-                        <a:srgbClr val="ECE3D4"/>
+                        <a:srgbClr val="F6E9D5"/>
                       </a:solidFill>
                       <a:prstDash val="solid"/>
                     </a:lnT>
                     <a:lnB w="9525" cap="flat" cmpd="sng" algn="ctr">
                       <a:solidFill>
-                        <a:srgbClr val="ECE3D4"/>
+                        <a:srgbClr val="F6E9D5"/>
                       </a:solidFill>
                       <a:prstDash val="solid"/>
                     </a:lnB>
                     <a:solidFill>
-                      <a:srgbClr val="ECE3D4"/>
+                      <a:srgbClr val="F6E9D5"/>
                     </a:solidFill>
                   </a:tcPr>
                 </a:tc>
@@ -4070,7 +4203,7 @@
                       <a:r>
                         <a:rPr sz="1500" b="0">
                           <a:solidFill>
-                            <a:srgbClr val="2B2B2B"/>
+                            <a:srgbClr val="26231F"/>
                           </a:solidFill>
                         </a:rPr>
                         <a:t>입력하세요</a:t>
@@ -4080,30 +4213,30 @@
                   <a:tcPr anchor="ctr" marL="73152" marR="73152">
                     <a:lnL w="9525" cap="flat" cmpd="sng" algn="ctr">
                       <a:solidFill>
-                        <a:srgbClr val="ECE3D4"/>
+                        <a:srgbClr val="F6E9D5"/>
                       </a:solidFill>
                       <a:prstDash val="solid"/>
                     </a:lnL>
                     <a:lnR w="9525" cap="flat" cmpd="sng" algn="ctr">
                       <a:solidFill>
-                        <a:srgbClr val="ECE3D4"/>
+                        <a:srgbClr val="F6E9D5"/>
                       </a:solidFill>
                       <a:prstDash val="solid"/>
                     </a:lnR>
                     <a:lnT w="9525" cap="flat" cmpd="sng" algn="ctr">
                       <a:solidFill>
-                        <a:srgbClr val="ECE3D4"/>
+                        <a:srgbClr val="F6E9D5"/>
                       </a:solidFill>
                       <a:prstDash val="solid"/>
                     </a:lnT>
                     <a:lnB w="9525" cap="flat" cmpd="sng" algn="ctr">
                       <a:solidFill>
-                        <a:srgbClr val="ECE3D4"/>
+                        <a:srgbClr val="F6E9D5"/>
                       </a:solidFill>
                       <a:prstDash val="solid"/>
                     </a:lnB>
                     <a:solidFill>
-                      <a:srgbClr val="F8F5F1"/>
+                      <a:srgbClr val="FBF5EC"/>
                     </a:solidFill>
                   </a:tcPr>
                 </a:tc>
@@ -4118,7 +4251,7 @@
                       <a:r>
                         <a:rPr sz="1500" b="1">
                           <a:solidFill>
-                            <a:srgbClr val="59472C"/>
+                            <a:srgbClr val="493B27"/>
                           </a:solidFill>
                         </a:rPr>
                         <a:t>부모의 마음</a:t>
@@ -4128,30 +4261,30 @@
                   <a:tcPr anchor="ctr" marL="73152" marR="73152">
                     <a:lnL w="9525" cap="flat" cmpd="sng" algn="ctr">
                       <a:solidFill>
-                        <a:srgbClr val="ECE3D4"/>
+                        <a:srgbClr val="F6E9D5"/>
                       </a:solidFill>
                       <a:prstDash val="solid"/>
                     </a:lnL>
                     <a:lnR w="9525" cap="flat" cmpd="sng" algn="ctr">
                       <a:solidFill>
-                        <a:srgbClr val="ECE3D4"/>
+                        <a:srgbClr val="F6E9D5"/>
                       </a:solidFill>
                       <a:prstDash val="solid"/>
                     </a:lnR>
                     <a:lnT w="9525" cap="flat" cmpd="sng" algn="ctr">
                       <a:solidFill>
-                        <a:srgbClr val="ECE3D4"/>
+                        <a:srgbClr val="F6E9D5"/>
                       </a:solidFill>
                       <a:prstDash val="solid"/>
                     </a:lnT>
                     <a:lnB w="9525" cap="flat" cmpd="sng" algn="ctr">
                       <a:solidFill>
-                        <a:srgbClr val="ECE3D4"/>
+                        <a:srgbClr val="F6E9D5"/>
                       </a:solidFill>
                       <a:prstDash val="solid"/>
                     </a:lnB>
                     <a:solidFill>
-                      <a:srgbClr val="ECE3D4"/>
+                      <a:srgbClr val="F6E9D5"/>
                     </a:solidFill>
                   </a:tcPr>
                 </a:tc>
@@ -4164,7 +4297,7 @@
                       <a:r>
                         <a:rPr sz="1500" b="0">
                           <a:solidFill>
-                            <a:srgbClr val="2B2B2B"/>
+                            <a:srgbClr val="26231F"/>
                           </a:solidFill>
                         </a:rPr>
                         <a:t>입력하세요</a:t>
@@ -4174,25 +4307,25 @@
                   <a:tcPr anchor="ctr" marL="73152" marR="73152">
                     <a:lnL w="9525" cap="flat" cmpd="sng" algn="ctr">
                       <a:solidFill>
-                        <a:srgbClr val="ECE3D4"/>
+                        <a:srgbClr val="F6E9D5"/>
                       </a:solidFill>
                       <a:prstDash val="solid"/>
                     </a:lnL>
                     <a:lnR w="9525" cap="flat" cmpd="sng" algn="ctr">
                       <a:solidFill>
-                        <a:srgbClr val="ECE3D4"/>
+                        <a:srgbClr val="F6E9D5"/>
                       </a:solidFill>
                       <a:prstDash val="solid"/>
                     </a:lnR>
                     <a:lnT w="9525" cap="flat" cmpd="sng" algn="ctr">
                       <a:solidFill>
-                        <a:srgbClr val="ECE3D4"/>
+                        <a:srgbClr val="F6E9D5"/>
                       </a:solidFill>
                       <a:prstDash val="solid"/>
                     </a:lnT>
                     <a:lnB w="9525" cap="flat" cmpd="sng" algn="ctr">
                       <a:solidFill>
-                        <a:srgbClr val="ECE3D4"/>
+                        <a:srgbClr val="F6E9D5"/>
                       </a:solidFill>
                       <a:prstDash val="solid"/>
                     </a:lnB>
@@ -4220,7 +4353,7 @@
     <p:bg>
       <p:bgPr>
         <a:solidFill>
-          <a:srgbClr val="FFFFFF"/>
+          <a:srgbClr val="F6E9D5"/>
         </a:solidFill>
         <a:effectLst/>
       </p:bgPr>
@@ -4240,14 +4373,14 @@
         </p:nvSpPr>
         <p:spPr>
           <a:xfrm>
-            <a:off x="-182880" y="6144768"/>
-            <a:ext cx="12557455" cy="731520"/>
-          </a:xfrm>
-          <a:prstGeom prst="wave">
+            <a:off x="640080" y="566928"/>
+            <a:ext cx="10911535" cy="10972"/>
+          </a:xfrm>
+          <a:prstGeom prst="rect">
             <a:avLst/>
           </a:prstGeom>
           <a:solidFill>
-            <a:srgbClr val="ECE3D4"/>
+            <a:srgbClr val="26231F"/>
           </a:solidFill>
           <a:ln>
             <a:noFill/>
@@ -4263,20 +4396,58 @@
       </p:sp>
       <p:sp>
         <p:nvSpPr>
-          <p:cNvPr id="4" name="장식"/>
+          <p:cNvPr id="4" name="상단 라벨"/>
+          <p:cNvSpPr txBox="1"/>
+          <p:nvPr/>
+        </p:nvSpPr>
+        <p:spPr>
+          <a:xfrm>
+            <a:off x="640080" y="237744"/>
+            <a:ext cx="5486400" cy="274320"/>
+          </a:xfrm>
+          <a:prstGeom prst="rect">
+            <a:avLst/>
+          </a:prstGeom>
+          <a:noFill/>
+        </p:spPr>
+        <p:txBody>
+          <a:bodyPr wrap="square" lIns="54864" rIns="54864" tIns="27432" bIns="27432" anchor="ctr">
+            <a:noAutofit/>
+          </a:bodyPr>
+          <a:lstStyle/>
+          <a:p>
+            <a:pPr algn="l">
+              <a:lnSpc>
+                <a:spcPct val="115000"/>
+              </a:lnSpc>
+            </a:pPr>
+            <a:r>
+              <a:rPr sz="900" b="1" i="0" spc="250">
+                <a:solidFill>
+                  <a:srgbClr val="26231F"/>
+                </a:solidFill>
+              </a:rPr>
+              <a:t>FIRST BIRTHDAY</a:t>
+            </a:r>
+          </a:p>
+        </p:txBody>
+      </p:sp>
+      <p:sp>
+        <p:nvSpPr>
+          <p:cNvPr id="5" name="포인트"/>
           <p:cNvSpPr/>
           <p:nvPr/>
         </p:nvSpPr>
         <p:spPr>
           <a:xfrm>
-            <a:off x="-182880" y="6400800"/>
-            <a:ext cx="12557455" cy="502920"/>
-          </a:xfrm>
-          <a:prstGeom prst="wave">
+            <a:off x="11204143" y="246888"/>
+            <a:ext cx="237744" cy="237744"/>
+          </a:xfrm>
+          <a:prstGeom prst="round2SameRect">
             <a:avLst/>
           </a:prstGeom>
           <a:solidFill>
-            <a:srgbClr val="9D7D4D"/>
+            <a:srgbClr val="D8B279"/>
           </a:solidFill>
           <a:ln>
             <a:noFill/>
@@ -4302,8 +4473,8 @@
         </p:nvSpPr>
         <p:spPr>
           <a:xfrm>
-            <a:off x="640080" y="457200"/>
-            <a:ext cx="9722815" cy="868680"/>
+            <a:off x="640080" y="731520"/>
+            <a:ext cx="10911535" cy="822960"/>
           </a:xfrm>
         </p:spPr>
         <p:txBody>
@@ -4320,7 +4491,7 @@
             <a:r>
               <a:rPr sz="3000" b="1" i="0">
                 <a:solidFill>
-                  <a:srgbClr val="59472C"/>
+                  <a:srgbClr val="26231F"/>
                 </a:solidFill>
               </a:rPr>
               <a:t>초대합니다</a:t>
@@ -4330,27 +4501,25 @@
       </p:sp>
       <p:sp>
         <p:nvSpPr>
-          <p:cNvPr id="5" name="초대 글 칸"/>
+          <p:cNvPr id="6" name="초대 글 칸"/>
           <p:cNvSpPr/>
           <p:nvPr/>
         </p:nvSpPr>
         <p:spPr>
           <a:xfrm>
-            <a:off x="640080" y="1554480"/>
-            <a:ext cx="10911535" cy="4389120"/>
+            <a:off x="640080" y="1783080"/>
+            <a:ext cx="10911535" cy="4572000"/>
           </a:xfrm>
           <a:prstGeom prst="roundRect">
             <a:avLst>
-              <a:gd name="adj" fmla="val 8000"/>
+              <a:gd name="adj" fmla="val 7000"/>
             </a:avLst>
           </a:prstGeom>
           <a:solidFill>
-            <a:srgbClr val="F8F5F1"/>
+            <a:srgbClr val="FBF5EC"/>
           </a:solidFill>
-          <a:ln w="12700">
-            <a:solidFill>
-              <a:srgbClr val="ECE3D4"/>
-            </a:solidFill>
+          <a:ln>
+            <a:noFill/>
           </a:ln>
         </p:spPr>
         <p:txBody>
@@ -4363,14 +4532,14 @@
       </p:sp>
       <p:sp>
         <p:nvSpPr>
-          <p:cNvPr id="6" name="초대 글"/>
+          <p:cNvPr id="7" name="초대 글"/>
           <p:cNvSpPr txBox="1"/>
           <p:nvPr/>
         </p:nvSpPr>
         <p:spPr>
           <a:xfrm>
-            <a:off x="1097280" y="1920240"/>
-            <a:ext cx="9997135" cy="3657600"/>
+            <a:off x="1097280" y="2148840"/>
+            <a:ext cx="9997135" cy="3840480"/>
           </a:xfrm>
           <a:prstGeom prst="rect">
             <a:avLst/>
@@ -4391,7 +4560,7 @@
             <a:r>
               <a:rPr sz="2000" b="0" i="0">
                 <a:solidFill>
-                  <a:srgbClr val="2B2B2B"/>
+                  <a:srgbClr val="26231F"/>
                 </a:solidFill>
               </a:rPr>
               <a:t>저희 아이의 첫 생일에 모십니다.</a:t>
@@ -4406,7 +4575,7 @@
             <a:r>
               <a:rPr sz="2000" b="0" i="0">
                 <a:solidFill>
-                  <a:srgbClr val="2B2B2B"/>
+                  <a:srgbClr val="26231F"/>
                 </a:solidFill>
               </a:rPr>
               <a:t/>
@@ -4421,7 +4590,7 @@
             <a:r>
               <a:rPr sz="2000" b="0" i="0">
                 <a:solidFill>
-                  <a:srgbClr val="2B2B2B"/>
+                  <a:srgbClr val="26231F"/>
                 </a:solidFill>
               </a:rPr>
               <a:t>오셔서 같이 밥 한 끼 해 주세요.</a:t>
@@ -4436,7 +4605,7 @@
             <a:r>
               <a:rPr sz="2000" b="0" i="0">
                 <a:solidFill>
-                  <a:srgbClr val="2B2B2B"/>
+                  <a:srgbClr val="26231F"/>
                 </a:solidFill>
               </a:rPr>
               <a:t/>
@@ -4451,7 +4620,7 @@
             <a:r>
               <a:rPr sz="2000" b="0" i="0">
                 <a:solidFill>
-                  <a:srgbClr val="2B2B2B"/>
+                  <a:srgbClr val="26231F"/>
                 </a:solidFill>
               </a:rPr>
               <a:t>일시 · 장소를 입력하세요</a:t>
@@ -4473,7 +4642,7 @@
     <p:bg>
       <p:bgPr>
         <a:solidFill>
-          <a:srgbClr val="FFFFFF"/>
+          <a:srgbClr val="F6E9D5"/>
         </a:solidFill>
         <a:effectLst/>
       </p:bgPr>
@@ -4493,14 +4662,14 @@
         </p:nvSpPr>
         <p:spPr>
           <a:xfrm>
-            <a:off x="-182880" y="6144768"/>
-            <a:ext cx="12557455" cy="731520"/>
-          </a:xfrm>
-          <a:prstGeom prst="wave">
+            <a:off x="640080" y="566928"/>
+            <a:ext cx="10911535" cy="10972"/>
+          </a:xfrm>
+          <a:prstGeom prst="rect">
             <a:avLst/>
           </a:prstGeom>
           <a:solidFill>
-            <a:srgbClr val="ECE3D4"/>
+            <a:srgbClr val="26231F"/>
           </a:solidFill>
           <a:ln>
             <a:noFill/>
@@ -4516,20 +4685,58 @@
       </p:sp>
       <p:sp>
         <p:nvSpPr>
-          <p:cNvPr id="4" name="장식"/>
+          <p:cNvPr id="4" name="상단 라벨"/>
+          <p:cNvSpPr txBox="1"/>
+          <p:nvPr/>
+        </p:nvSpPr>
+        <p:spPr>
+          <a:xfrm>
+            <a:off x="640080" y="237744"/>
+            <a:ext cx="5486400" cy="274320"/>
+          </a:xfrm>
+          <a:prstGeom prst="rect">
+            <a:avLst/>
+          </a:prstGeom>
+          <a:noFill/>
+        </p:spPr>
+        <p:txBody>
+          <a:bodyPr wrap="square" lIns="54864" rIns="54864" tIns="27432" bIns="27432" anchor="ctr">
+            <a:noAutofit/>
+          </a:bodyPr>
+          <a:lstStyle/>
+          <a:p>
+            <a:pPr algn="l">
+              <a:lnSpc>
+                <a:spcPct val="115000"/>
+              </a:lnSpc>
+            </a:pPr>
+            <a:r>
+              <a:rPr sz="900" b="1" i="0" spc="250">
+                <a:solidFill>
+                  <a:srgbClr val="26231F"/>
+                </a:solidFill>
+              </a:rPr>
+              <a:t>FIRST BIRTHDAY</a:t>
+            </a:r>
+          </a:p>
+        </p:txBody>
+      </p:sp>
+      <p:sp>
+        <p:nvSpPr>
+          <p:cNvPr id="5" name="포인트"/>
           <p:cNvSpPr/>
           <p:nvPr/>
         </p:nvSpPr>
         <p:spPr>
           <a:xfrm>
-            <a:off x="-182880" y="6400800"/>
-            <a:ext cx="12557455" cy="502920"/>
-          </a:xfrm>
-          <a:prstGeom prst="wave">
+            <a:off x="11204143" y="246888"/>
+            <a:ext cx="237744" cy="237744"/>
+          </a:xfrm>
+          <a:prstGeom prst="round2SameRect">
             <a:avLst/>
           </a:prstGeom>
           <a:solidFill>
-            <a:srgbClr val="9D7D4D"/>
+            <a:srgbClr val="D8B279"/>
           </a:solidFill>
           <a:ln>
             <a:noFill/>
@@ -4555,8 +4762,8 @@
         </p:nvSpPr>
         <p:spPr>
           <a:xfrm>
-            <a:off x="640080" y="457200"/>
-            <a:ext cx="9722815" cy="868680"/>
+            <a:off x="640080" y="731520"/>
+            <a:ext cx="10911535" cy="822960"/>
           </a:xfrm>
         </p:spPr>
         <p:txBody>
@@ -4573,7 +4780,7 @@
             <a:r>
               <a:rPr sz="3000" b="1" i="0">
                 <a:solidFill>
-                  <a:srgbClr val="59472C"/>
+                  <a:srgbClr val="26231F"/>
                 </a:solidFill>
               </a:rPr>
               <a:t>부모의 한마디</a:t>
@@ -4583,27 +4790,25 @@
       </p:sp>
       <p:sp>
         <p:nvSpPr>
-          <p:cNvPr id="5" name="편지 칸"/>
+          <p:cNvPr id="6" name="편지 칸"/>
           <p:cNvSpPr/>
           <p:nvPr/>
         </p:nvSpPr>
         <p:spPr>
           <a:xfrm>
-            <a:off x="640080" y="1554480"/>
-            <a:ext cx="10911535" cy="4389120"/>
+            <a:off x="640080" y="1783080"/>
+            <a:ext cx="10911535" cy="4572000"/>
           </a:xfrm>
           <a:prstGeom prst="roundRect">
             <a:avLst>
-              <a:gd name="adj" fmla="val 8000"/>
+              <a:gd name="adj" fmla="val 7000"/>
             </a:avLst>
           </a:prstGeom>
           <a:solidFill>
-            <a:srgbClr val="ECE3D4"/>
+            <a:srgbClr val="F6E9D5"/>
           </a:solidFill>
-          <a:ln w="12700">
-            <a:solidFill>
-              <a:srgbClr val="9D7D4D"/>
-            </a:solidFill>
+          <a:ln>
+            <a:noFill/>
           </a:ln>
         </p:spPr>
         <p:txBody>
@@ -4616,14 +4821,14 @@
       </p:sp>
       <p:sp>
         <p:nvSpPr>
-          <p:cNvPr id="6" name="편지 글"/>
+          <p:cNvPr id="7" name="편지 글"/>
           <p:cNvSpPr txBox="1"/>
           <p:nvPr/>
         </p:nvSpPr>
         <p:spPr>
           <a:xfrm>
-            <a:off x="1097280" y="1920240"/>
-            <a:ext cx="9997135" cy="3657600"/>
+            <a:off x="1097280" y="2148840"/>
+            <a:ext cx="9997135" cy="3840480"/>
           </a:xfrm>
           <a:prstGeom prst="rect">
             <a:avLst/>
@@ -4644,7 +4849,7 @@
             <a:r>
               <a:rPr sz="2000" b="0" i="0">
                 <a:solidFill>
-                  <a:srgbClr val="2B2B2B"/>
+                  <a:srgbClr val="26231F"/>
                 </a:solidFill>
               </a:rPr>
               <a:t>사랑하는 우리 아기에게</a:t>
@@ -4659,7 +4864,7 @@
             <a:r>
               <a:rPr sz="2000" b="0" i="0">
                 <a:solidFill>
-                  <a:srgbClr val="2B2B2B"/>
+                  <a:srgbClr val="26231F"/>
                 </a:solidFill>
               </a:rPr>
               <a:t/>
@@ -4674,7 +4879,7 @@
             <a:r>
               <a:rPr sz="2000" b="0" i="0">
                 <a:solidFill>
-                  <a:srgbClr val="2B2B2B"/>
+                  <a:srgbClr val="26231F"/>
                 </a:solidFill>
               </a:rPr>
               <a:t>엄마 아빠의 마음을 적어 주세요.</a:t>
@@ -4689,7 +4894,7 @@
             <a:r>
               <a:rPr sz="2000" b="0" i="0">
                 <a:solidFill>
-                  <a:srgbClr val="2B2B2B"/>
+                  <a:srgbClr val="26231F"/>
                 </a:solidFill>
               </a:rPr>
               <a:t/>
@@ -4704,7 +4909,7 @@
             <a:r>
               <a:rPr sz="2000" b="0" i="0">
                 <a:solidFill>
-                  <a:srgbClr val="2B2B2B"/>
+                  <a:srgbClr val="26231F"/>
                 </a:solidFill>
               </a:rPr>
               <a:t>― 엄마 아빠가</a:t>
@@ -4726,7 +4931,7 @@
     <p:bg>
       <p:bgPr>
         <a:solidFill>
-          <a:srgbClr val="FFFFFF"/>
+          <a:srgbClr val="F6E9D5"/>
         </a:solidFill>
         <a:effectLst/>
       </p:bgPr>
@@ -4746,14 +4951,14 @@
         </p:nvSpPr>
         <p:spPr>
           <a:xfrm>
-            <a:off x="-182880" y="6144768"/>
-            <a:ext cx="12557455" cy="731520"/>
-          </a:xfrm>
-          <a:prstGeom prst="wave">
+            <a:off x="640080" y="566928"/>
+            <a:ext cx="10911535" cy="10972"/>
+          </a:xfrm>
+          <a:prstGeom prst="rect">
             <a:avLst/>
           </a:prstGeom>
           <a:solidFill>
-            <a:srgbClr val="ECE3D4"/>
+            <a:srgbClr val="26231F"/>
           </a:solidFill>
           <a:ln>
             <a:noFill/>
@@ -4769,20 +4974,58 @@
       </p:sp>
       <p:sp>
         <p:nvSpPr>
-          <p:cNvPr id="4" name="장식"/>
+          <p:cNvPr id="4" name="상단 라벨"/>
+          <p:cNvSpPr txBox="1"/>
+          <p:nvPr/>
+        </p:nvSpPr>
+        <p:spPr>
+          <a:xfrm>
+            <a:off x="640080" y="237744"/>
+            <a:ext cx="5486400" cy="274320"/>
+          </a:xfrm>
+          <a:prstGeom prst="rect">
+            <a:avLst/>
+          </a:prstGeom>
+          <a:noFill/>
+        </p:spPr>
+        <p:txBody>
+          <a:bodyPr wrap="square" lIns="54864" rIns="54864" tIns="27432" bIns="27432" anchor="ctr">
+            <a:noAutofit/>
+          </a:bodyPr>
+          <a:lstStyle/>
+          <a:p>
+            <a:pPr algn="l">
+              <a:lnSpc>
+                <a:spcPct val="115000"/>
+              </a:lnSpc>
+            </a:pPr>
+            <a:r>
+              <a:rPr sz="900" b="1" i="0" spc="250">
+                <a:solidFill>
+                  <a:srgbClr val="26231F"/>
+                </a:solidFill>
+              </a:rPr>
+              <a:t>FIRST BIRTHDAY</a:t>
+            </a:r>
+          </a:p>
+        </p:txBody>
+      </p:sp>
+      <p:sp>
+        <p:nvSpPr>
+          <p:cNvPr id="5" name="포인트"/>
           <p:cNvSpPr/>
           <p:nvPr/>
         </p:nvSpPr>
         <p:spPr>
           <a:xfrm>
-            <a:off x="-182880" y="6400800"/>
-            <a:ext cx="12557455" cy="502920"/>
-          </a:xfrm>
-          <a:prstGeom prst="wave">
+            <a:off x="11204143" y="246888"/>
+            <a:ext cx="237744" cy="237744"/>
+          </a:xfrm>
+          <a:prstGeom prst="round2SameRect">
             <a:avLst/>
           </a:prstGeom>
           <a:solidFill>
-            <a:srgbClr val="9D7D4D"/>
+            <a:srgbClr val="D8B279"/>
           </a:solidFill>
           <a:ln>
             <a:noFill/>
@@ -4808,8 +5051,8 @@
         </p:nvSpPr>
         <p:spPr>
           <a:xfrm>
-            <a:off x="640080" y="457200"/>
-            <a:ext cx="9722815" cy="868680"/>
+            <a:off x="640080" y="731520"/>
+            <a:ext cx="10911535" cy="822960"/>
           </a:xfrm>
         </p:spPr>
         <p:txBody>
@@ -4826,7 +5069,7 @@
             <a:r>
               <a:rPr sz="3000" b="1" i="0">
                 <a:solidFill>
-                  <a:srgbClr val="59472C"/>
+                  <a:srgbClr val="26231F"/>
                 </a:solidFill>
               </a:rPr>
               <a:t>사진 모음</a:t>
@@ -4836,14 +5079,14 @@
       </p:sp>
       <p:sp>
         <p:nvSpPr>
-          <p:cNvPr id="5" name="사진 자리"/>
+          <p:cNvPr id="6" name="사진 자리"/>
           <p:cNvSpPr/>
           <p:nvPr/>
         </p:nvSpPr>
         <p:spPr>
           <a:xfrm>
-            <a:off x="640080" y="1554480"/>
-            <a:ext cx="2590723" cy="2103120"/>
+            <a:off x="640080" y="1783080"/>
+            <a:ext cx="2590723" cy="2194560"/>
           </a:xfrm>
           <a:prstGeom prst="roundRect">
             <a:avLst>
@@ -4851,12 +5094,10 @@
             </a:avLst>
           </a:prstGeom>
           <a:solidFill>
-            <a:srgbClr val="ECE3D4"/>
+            <a:srgbClr val="F6E9D5"/>
           </a:solidFill>
           <a:ln w="19050">
-            <a:solidFill>
-              <a:srgbClr val="9D7D4D"/>
-            </a:solidFill>
+            <a:noFill/>
             <a:prstDash val="dash"/>
           </a:ln>
         </p:spPr>
@@ -4874,7 +5115,7 @@
             <a:r>
               <a:rPr sz="1200" b="0" i="0">
                 <a:solidFill>
-                  <a:srgbClr val="59472C"/>
+                  <a:srgbClr val="8E8780"/>
                 </a:solidFill>
               </a:rPr>
               <a:t>사진 1</a:t>
@@ -4884,14 +5125,14 @@
       </p:sp>
       <p:sp>
         <p:nvSpPr>
-          <p:cNvPr id="6" name="사진 자리"/>
+          <p:cNvPr id="7" name="사진 자리"/>
           <p:cNvSpPr/>
           <p:nvPr/>
         </p:nvSpPr>
         <p:spPr>
           <a:xfrm>
-            <a:off x="3413683" y="1554480"/>
-            <a:ext cx="2590723" cy="2103120"/>
+            <a:off x="3413683" y="1783080"/>
+            <a:ext cx="2590723" cy="2194560"/>
           </a:xfrm>
           <a:prstGeom prst="roundRect">
             <a:avLst>
@@ -4899,12 +5140,10 @@
             </a:avLst>
           </a:prstGeom>
           <a:solidFill>
-            <a:srgbClr val="ECE3D4"/>
+            <a:srgbClr val="F6E9D5"/>
           </a:solidFill>
           <a:ln w="19050">
-            <a:solidFill>
-              <a:srgbClr val="9D7D4D"/>
-            </a:solidFill>
+            <a:noFill/>
             <a:prstDash val="dash"/>
           </a:ln>
         </p:spPr>
@@ -4922,7 +5161,7 @@
             <a:r>
               <a:rPr sz="1200" b="0" i="0">
                 <a:solidFill>
-                  <a:srgbClr val="59472C"/>
+                  <a:srgbClr val="8E8780"/>
                 </a:solidFill>
               </a:rPr>
               <a:t>사진 2</a:t>
@@ -4932,14 +5171,14 @@
       </p:sp>
       <p:sp>
         <p:nvSpPr>
-          <p:cNvPr id="7" name="사진 자리"/>
+          <p:cNvPr id="8" name="사진 자리"/>
           <p:cNvSpPr/>
           <p:nvPr/>
         </p:nvSpPr>
         <p:spPr>
           <a:xfrm>
-            <a:off x="6187287" y="1554480"/>
-            <a:ext cx="2590723" cy="2103120"/>
+            <a:off x="6187287" y="1783080"/>
+            <a:ext cx="2590723" cy="2194560"/>
           </a:xfrm>
           <a:prstGeom prst="roundRect">
             <a:avLst>
@@ -4947,12 +5186,10 @@
             </a:avLst>
           </a:prstGeom>
           <a:solidFill>
-            <a:srgbClr val="ECE3D4"/>
+            <a:srgbClr val="F6E9D5"/>
           </a:solidFill>
           <a:ln w="19050">
-            <a:solidFill>
-              <a:srgbClr val="9D7D4D"/>
-            </a:solidFill>
+            <a:noFill/>
             <a:prstDash val="dash"/>
           </a:ln>
         </p:spPr>
@@ -4970,7 +5207,7 @@
             <a:r>
               <a:rPr sz="1200" b="0" i="0">
                 <a:solidFill>
-                  <a:srgbClr val="59472C"/>
+                  <a:srgbClr val="8E8780"/>
                 </a:solidFill>
               </a:rPr>
               <a:t>사진 3</a:t>
@@ -4980,14 +5217,14 @@
       </p:sp>
       <p:sp>
         <p:nvSpPr>
-          <p:cNvPr id="8" name="사진 자리"/>
+          <p:cNvPr id="9" name="사진 자리"/>
           <p:cNvSpPr/>
           <p:nvPr/>
         </p:nvSpPr>
         <p:spPr>
           <a:xfrm>
-            <a:off x="8960891" y="1554480"/>
-            <a:ext cx="2590723" cy="2103120"/>
+            <a:off x="8960891" y="1783080"/>
+            <a:ext cx="2590723" cy="2194560"/>
           </a:xfrm>
           <a:prstGeom prst="roundRect">
             <a:avLst>
@@ -4995,12 +5232,10 @@
             </a:avLst>
           </a:prstGeom>
           <a:solidFill>
-            <a:srgbClr val="ECE3D4"/>
+            <a:srgbClr val="F6E9D5"/>
           </a:solidFill>
           <a:ln w="19050">
-            <a:solidFill>
-              <a:srgbClr val="9D7D4D"/>
-            </a:solidFill>
+            <a:noFill/>
             <a:prstDash val="dash"/>
           </a:ln>
         </p:spPr>
@@ -5018,7 +5253,7 @@
             <a:r>
               <a:rPr sz="1200" b="0" i="0">
                 <a:solidFill>
-                  <a:srgbClr val="59472C"/>
+                  <a:srgbClr val="8E8780"/>
                 </a:solidFill>
               </a:rPr>
               <a:t>사진 4</a:t>
@@ -5028,14 +5263,14 @@
       </p:sp>
       <p:sp>
         <p:nvSpPr>
-          <p:cNvPr id="9" name="사진 자리"/>
+          <p:cNvPr id="10" name="사진 자리"/>
           <p:cNvSpPr/>
           <p:nvPr/>
         </p:nvSpPr>
         <p:spPr>
           <a:xfrm>
-            <a:off x="640080" y="3840480"/>
-            <a:ext cx="2590723" cy="2103120"/>
+            <a:off x="640080" y="4160520"/>
+            <a:ext cx="2590723" cy="2194560"/>
           </a:xfrm>
           <a:prstGeom prst="roundRect">
             <a:avLst>
@@ -5043,12 +5278,10 @@
             </a:avLst>
           </a:prstGeom>
           <a:solidFill>
-            <a:srgbClr val="ECE3D4"/>
+            <a:srgbClr val="F6E9D5"/>
           </a:solidFill>
           <a:ln w="19050">
-            <a:solidFill>
-              <a:srgbClr val="9D7D4D"/>
-            </a:solidFill>
+            <a:noFill/>
             <a:prstDash val="dash"/>
           </a:ln>
         </p:spPr>
@@ -5066,7 +5299,7 @@
             <a:r>
               <a:rPr sz="1200" b="0" i="0">
                 <a:solidFill>
-                  <a:srgbClr val="59472C"/>
+                  <a:srgbClr val="8E8780"/>
                 </a:solidFill>
               </a:rPr>
               <a:t>사진 5</a:t>
@@ -5076,14 +5309,14 @@
       </p:sp>
       <p:sp>
         <p:nvSpPr>
-          <p:cNvPr id="10" name="사진 자리"/>
+          <p:cNvPr id="11" name="사진 자리"/>
           <p:cNvSpPr/>
           <p:nvPr/>
         </p:nvSpPr>
         <p:spPr>
           <a:xfrm>
-            <a:off x="3413683" y="3840480"/>
-            <a:ext cx="2590723" cy="2103120"/>
+            <a:off x="3413683" y="4160520"/>
+            <a:ext cx="2590723" cy="2194560"/>
           </a:xfrm>
           <a:prstGeom prst="roundRect">
             <a:avLst>
@@ -5091,12 +5324,10 @@
             </a:avLst>
           </a:prstGeom>
           <a:solidFill>
-            <a:srgbClr val="ECE3D4"/>
+            <a:srgbClr val="F6E9D5"/>
           </a:solidFill>
           <a:ln w="19050">
-            <a:solidFill>
-              <a:srgbClr val="9D7D4D"/>
-            </a:solidFill>
+            <a:noFill/>
             <a:prstDash val="dash"/>
           </a:ln>
         </p:spPr>
@@ -5114,7 +5345,7 @@
             <a:r>
               <a:rPr sz="1200" b="0" i="0">
                 <a:solidFill>
-                  <a:srgbClr val="59472C"/>
+                  <a:srgbClr val="8E8780"/>
                 </a:solidFill>
               </a:rPr>
               <a:t>사진 6</a:t>
@@ -5124,14 +5355,14 @@
       </p:sp>
       <p:sp>
         <p:nvSpPr>
-          <p:cNvPr id="11" name="사진 자리"/>
+          <p:cNvPr id="12" name="사진 자리"/>
           <p:cNvSpPr/>
           <p:nvPr/>
         </p:nvSpPr>
         <p:spPr>
           <a:xfrm>
-            <a:off x="6187287" y="3840480"/>
-            <a:ext cx="2590723" cy="2103120"/>
+            <a:off x="6187287" y="4160520"/>
+            <a:ext cx="2590723" cy="2194560"/>
           </a:xfrm>
           <a:prstGeom prst="roundRect">
             <a:avLst>
@@ -5139,12 +5370,10 @@
             </a:avLst>
           </a:prstGeom>
           <a:solidFill>
-            <a:srgbClr val="ECE3D4"/>
+            <a:srgbClr val="F6E9D5"/>
           </a:solidFill>
           <a:ln w="19050">
-            <a:solidFill>
-              <a:srgbClr val="9D7D4D"/>
-            </a:solidFill>
+            <a:noFill/>
             <a:prstDash val="dash"/>
           </a:ln>
         </p:spPr>
@@ -5162,7 +5391,7 @@
             <a:r>
               <a:rPr sz="1200" b="0" i="0">
                 <a:solidFill>
-                  <a:srgbClr val="59472C"/>
+                  <a:srgbClr val="8E8780"/>
                 </a:solidFill>
               </a:rPr>
               <a:t>사진 7</a:t>
@@ -5172,14 +5401,14 @@
       </p:sp>
       <p:sp>
         <p:nvSpPr>
-          <p:cNvPr id="12" name="사진 자리"/>
+          <p:cNvPr id="13" name="사진 자리"/>
           <p:cNvSpPr/>
           <p:nvPr/>
         </p:nvSpPr>
         <p:spPr>
           <a:xfrm>
-            <a:off x="8960891" y="3840480"/>
-            <a:ext cx="2590723" cy="2103120"/>
+            <a:off x="8960891" y="4160520"/>
+            <a:ext cx="2590723" cy="2194560"/>
           </a:xfrm>
           <a:prstGeom prst="roundRect">
             <a:avLst>
@@ -5187,12 +5416,10 @@
             </a:avLst>
           </a:prstGeom>
           <a:solidFill>
-            <a:srgbClr val="ECE3D4"/>
+            <a:srgbClr val="F6E9D5"/>
           </a:solidFill>
           <a:ln w="19050">
-            <a:solidFill>
-              <a:srgbClr val="9D7D4D"/>
-            </a:solidFill>
+            <a:noFill/>
             <a:prstDash val="dash"/>
           </a:ln>
         </p:spPr>
@@ -5210,7 +5437,7 @@
             <a:r>
               <a:rPr sz="1200" b="0" i="0">
                 <a:solidFill>
-                  <a:srgbClr val="59472C"/>
+                  <a:srgbClr val="8E8780"/>
                 </a:solidFill>
               </a:rPr>
               <a:t>사진 8</a:t>
@@ -5229,6 +5456,14 @@
 <file path=ppt/slides/slide6.xml><?xml version="1.0" encoding="utf-8"?>
 <p:sld xmlns:a="http://schemas.openxmlformats.org/drawingml/2006/main" xmlns:p="http://schemas.openxmlformats.org/presentationml/2006/main" xmlns:r="http://schemas.openxmlformats.org/officeDocument/2006/relationships">
   <p:cSld>
+    <p:bg>
+      <p:bgPr>
+        <a:solidFill>
+          <a:srgbClr val="FBF5EC"/>
+        </a:solidFill>
+        <a:effectLst/>
+      </p:bgPr>
+    </p:bg>
     <p:spTree>
       <p:nvGrpSpPr>
         <p:cNvPr id="1" name=""/>
@@ -5236,30 +5471,119 @@
         <p:nvPr/>
       </p:nvGrpSpPr>
       <p:grpSpPr/>
-      <p:pic>
-        <p:nvPicPr>
-          <p:cNvPr id="3" name="표지 그림" descr="birthday-29.jpg"/>
-          <p:cNvPicPr>
-            <a:picLocks noChangeAspect="1"/>
-          </p:cNvPicPr>
+      <p:sp>
+        <p:nvSpPr>
+          <p:cNvPr id="3" name="사진 자리"/>
+          <p:cNvSpPr/>
           <p:nvPr/>
-        </p:nvPicPr>
-        <p:blipFill>
-          <a:blip r:embed="rId2"/>
-          <a:stretch>
-            <a:fillRect/>
-          </a:stretch>
-        </p:blipFill>
-        <p:spPr>
-          <a:xfrm>
-            <a:off x="0" y="0"/>
-            <a:ext cx="12191695" cy="6858000"/>
+        </p:nvSpPr>
+        <p:spPr>
+          <a:xfrm>
+            <a:off x="1463003" y="685800"/>
+            <a:ext cx="3169840" cy="5486400"/>
+          </a:xfrm>
+          <a:prstGeom prst="round2SameRect">
+            <a:avLst>
+              <a:gd name="adj1" fmla="val 50000"/>
+              <a:gd name="adj2" fmla="val 0"/>
+            </a:avLst>
+          </a:prstGeom>
+          <a:solidFill>
+            <a:srgbClr val="EBD2AD"/>
+          </a:solidFill>
+          <a:ln>
+            <a:noFill/>
+          </a:ln>
+        </p:spPr>
+        <p:txBody>
+          <a:bodyPr rtlCol="0" anchor="ctr" wrap="square" lIns="54864" rIns="54864" tIns="27432" bIns="27432">
+            <a:noAutofit/>
+          </a:bodyPr>
+          <a:lstStyle/>
+          <a:p>
+            <a:pPr algn="ctr">
+              <a:lnSpc>
+                <a:spcPct val="100000"/>
+              </a:lnSpc>
+            </a:pPr>
+            <a:r>
+              <a:rPr sz="1400" b="0" i="0">
+                <a:solidFill>
+                  <a:srgbClr val="493B27"/>
+                </a:solidFill>
+              </a:rPr>
+              <a:t>사진을 넣어 주세요</a:t>
+            </a:r>
+          </a:p>
+        </p:txBody>
+      </p:sp>
+      <p:sp>
+        <p:nvSpPr>
+          <p:cNvPr id="4" name="장식"/>
+          <p:cNvSpPr/>
+          <p:nvPr/>
+        </p:nvSpPr>
+        <p:spPr>
+          <a:xfrm>
+            <a:off x="4358505" y="4251960"/>
+            <a:ext cx="1005840" cy="1005840"/>
+          </a:xfrm>
+          <a:prstGeom prst="ellipse">
+            <a:avLst/>
+          </a:prstGeom>
+          <a:solidFill>
+            <a:srgbClr val="EBD2AD"/>
+          </a:solidFill>
+          <a:ln>
+            <a:noFill/>
+          </a:ln>
+        </p:spPr>
+        <p:txBody>
+          <a:bodyPr rtlCol="0" anchor="ctr"/>
+          <a:lstStyle/>
+          <a:p>
+            <a:pPr algn="ctr"/>
+          </a:p>
+        </p:txBody>
+      </p:sp>
+      <p:sp>
+        <p:nvSpPr>
+          <p:cNvPr id="5" name="라벨"/>
+          <p:cNvSpPr txBox="1"/>
+          <p:nvPr/>
+        </p:nvSpPr>
+        <p:spPr>
+          <a:xfrm>
+            <a:off x="6827349" y="2148840"/>
+            <a:ext cx="4632844" cy="274320"/>
           </a:xfrm>
           <a:prstGeom prst="rect">
             <a:avLst/>
           </a:prstGeom>
-        </p:spPr>
-      </p:pic>
+          <a:noFill/>
+        </p:spPr>
+        <p:txBody>
+          <a:bodyPr wrap="square" lIns="54864" rIns="54864" tIns="27432" bIns="27432" anchor="t">
+            <a:noAutofit/>
+          </a:bodyPr>
+          <a:lstStyle/>
+          <a:p>
+            <a:pPr algn="l">
+              <a:lnSpc>
+                <a:spcPct val="115000"/>
+              </a:lnSpc>
+            </a:pPr>
+            <a:r>
+              <a:rPr sz="1000" b="1" i="0" spc="250">
+                <a:solidFill>
+                  <a:srgbClr val="26231F"/>
+                </a:solidFill>
+              </a:rPr>
+              <a:t>FIRST BIRTHDAY</a:t>
+            </a:r>
+          </a:p>
+        </p:txBody>
+      </p:sp>
       <p:sp>
         <p:nvSpPr>
           <p:cNvPr id="2" name="Title 1"/>
@@ -5272,8 +5596,8 @@
         </p:nvSpPr>
         <p:spPr>
           <a:xfrm>
-            <a:off x="853418" y="2057400"/>
-            <a:ext cx="6095847" cy="1554480"/>
+            <a:off x="6827349" y="2606040"/>
+            <a:ext cx="4632844" cy="1188720"/>
           </a:xfrm>
         </p:spPr>
         <p:txBody>
@@ -5290,7 +5614,7 @@
             <a:r>
               <a:rPr sz="3400" b="1" i="0">
                 <a:solidFill>
-                  <a:srgbClr val="59472C"/>
+                  <a:srgbClr val="26231F"/>
                 </a:solidFill>
               </a:rPr>
               <a:t>와 주셔서 고맙습니다</a:t>
@@ -5300,14 +5624,14 @@
       </p:sp>
       <p:sp>
         <p:nvSpPr>
-          <p:cNvPr id="4" name="한 줄 문구"/>
+          <p:cNvPr id="6" name="한 줄 문구"/>
           <p:cNvSpPr txBox="1"/>
           <p:nvPr/>
         </p:nvSpPr>
         <p:spPr>
           <a:xfrm>
-            <a:off x="853418" y="3749039"/>
-            <a:ext cx="6095847" cy="822960"/>
+            <a:off x="6827349" y="3886200"/>
+            <a:ext cx="4632844" cy="822960"/>
           </a:xfrm>
           <a:prstGeom prst="rect">
             <a:avLst/>
@@ -5326,9 +5650,9 @@
               </a:lnSpc>
             </a:pPr>
             <a:r>
-              <a:rPr sz="1700" b="0" i="1">
+              <a:rPr sz="1700" b="0" i="0">
                 <a:solidFill>
-                  <a:srgbClr val="59472C"/>
+                  <a:srgbClr val="26231F"/>
                 </a:solidFill>
               </a:rPr>
               <a:t>아이가 한 살이 되었습니다</a:t>
@@ -5338,14 +5662,14 @@
       </p:sp>
       <p:sp>
         <p:nvSpPr>
-          <p:cNvPr id="5" name="안내 문구"/>
+          <p:cNvPr id="7" name="안내 문구"/>
           <p:cNvSpPr txBox="1"/>
           <p:nvPr/>
         </p:nvSpPr>
         <p:spPr>
           <a:xfrm>
-            <a:off x="853418" y="4617720"/>
-            <a:ext cx="6095847" cy="914400"/>
+            <a:off x="6827349" y="4754880"/>
+            <a:ext cx="4632844" cy="914400"/>
           </a:xfrm>
           <a:prstGeom prst="rect">
             <a:avLst/>
@@ -5366,7 +5690,7 @@
             <a:r>
               <a:rPr sz="1400" b="0" i="0">
                 <a:solidFill>
-                  <a:srgbClr val="666666"/>
+                  <a:srgbClr val="26231F"/>
                 </a:solidFill>
               </a:rPr>
               <a:t>아기 이름 · 부모 이름</a:t>
@@ -5393,34 +5717,34 @@
         <a:sysClr val="window" lastClr="FFFFFF"/>
       </a:lt1>
       <a:dk2>
-        <a:srgbClr val="59472C"/>
+        <a:srgbClr val="493B27"/>
       </a:dk2>
       <a:lt2>
-        <a:srgbClr val="F8F5F1"/>
+        <a:srgbClr val="FBF5EC"/>
       </a:lt2>
       <a:accent1>
-        <a:srgbClr val="9D7D4D"/>
+        <a:srgbClr val="D8B279"/>
       </a:accent1>
       <a:accent2>
-        <a:srgbClr val="438289"/>
+        <a:srgbClr val="DCE198"/>
       </a:accent2>
       <a:accent3>
-        <a:srgbClr val="59472C"/>
+        <a:srgbClr val="493B27"/>
       </a:accent3>
       <a:accent4>
-        <a:srgbClr val="ECE3D4"/>
+        <a:srgbClr val="F6E9D5"/>
       </a:accent4>
       <a:accent5>
-        <a:srgbClr val="70806B"/>
+        <a:srgbClr val="DACA88"/>
       </a:accent5>
       <a:accent6>
-        <a:srgbClr val="9B9180"/>
+        <a:srgbClr val="92897D"/>
       </a:accent6>
       <a:hlink>
-        <a:srgbClr val="9D7D4D"/>
+        <a:srgbClr val="D8B279"/>
       </a:hlink>
       <a:folHlink>
-        <a:srgbClr val="59472C"/>
+        <a:srgbClr val="493B27"/>
       </a:folHlink>
     </a:clrScheme>
     <a:fontScheme name="Office">
